--- a/SRWE_Module_12.pptx
+++ b/SRWE_Module_12.pptx
@@ -262,7 +262,7 @@
 <file path=ppt/revisionInfo.xml><?xml version="1.0" encoding="utf-8"?>
 <p1510:revInfo xmlns:a="http://schemas.openxmlformats.org/drawingml/2006/main" xmlns:r="http://schemas.openxmlformats.org/officeDocument/2006/relationships" xmlns:p1510="http://schemas.microsoft.com/office/powerpoint/2015/10/main">
   <p1510:revLst>
-    <p1510:client id="{45EE59DA-912A-7666-4C1A-373E6936F9A1}" v="8" dt="2026-05-07T09:04:02.869"/>
+    <p1510:client id="{37418C0E-247D-FE4F-BBD1-1AC50259A269}" v="2" dt="2026-05-11T05:08:25.707"/>
   </p1510:revLst>
 </p1510:revInfo>
 </file>
@@ -337,10 +337,41 @@
   <pc:docChgLst>
     <pc:chgData name="Baráth, Július" userId="aebde9b9-dccc-4475-a9ac-c05e78323d7a" providerId="ADAL" clId="{4A0811C8-ED2F-505E-B787-C8270CED5046}"/>
     <pc:docChg chg="modSld">
-      <pc:chgData name="Baráth, Július" userId="aebde9b9-dccc-4475-a9ac-c05e78323d7a" providerId="ADAL" clId="{4A0811C8-ED2F-505E-B787-C8270CED5046}" dt="2026-05-07T09:34:49.351" v="11" actId="20577"/>
+      <pc:chgData name="Baráth, Július" userId="aebde9b9-dccc-4475-a9ac-c05e78323d7a" providerId="ADAL" clId="{4A0811C8-ED2F-505E-B787-C8270CED5046}" dt="2026-05-11T05:38:03.024" v="41" actId="113"/>
       <pc:docMkLst>
         <pc:docMk/>
       </pc:docMkLst>
+      <pc:sldChg chg="addSp modSp mod">
+        <pc:chgData name="Baráth, Július" userId="aebde9b9-dccc-4475-a9ac-c05e78323d7a" providerId="ADAL" clId="{4A0811C8-ED2F-505E-B787-C8270CED5046}" dt="2026-05-11T05:38:03.024" v="41" actId="113"/>
+        <pc:sldMkLst>
+          <pc:docMk/>
+          <pc:sldMk cId="3700394357" sldId="1111"/>
+        </pc:sldMkLst>
+        <pc:spChg chg="add mod">
+          <ac:chgData name="Baráth, Július" userId="aebde9b9-dccc-4475-a9ac-c05e78323d7a" providerId="ADAL" clId="{4A0811C8-ED2F-505E-B787-C8270CED5046}" dt="2026-05-11T05:08:24.320" v="13" actId="767"/>
+          <ac:spMkLst>
+            <pc:docMk/>
+            <pc:sldMk cId="3700394357" sldId="1111"/>
+            <ac:spMk id="2" creationId="{7C9A1B41-F74A-6087-E7C8-9B47B6B1408A}"/>
+          </ac:spMkLst>
+        </pc:spChg>
+        <pc:graphicFrameChg chg="add mod modGraphic">
+          <ac:chgData name="Baráth, Július" userId="aebde9b9-dccc-4475-a9ac-c05e78323d7a" providerId="ADAL" clId="{4A0811C8-ED2F-505E-B787-C8270CED5046}" dt="2026-05-11T05:38:03.024" v="41" actId="113"/>
+          <ac:graphicFrameMkLst>
+            <pc:docMk/>
+            <pc:sldMk cId="3700394357" sldId="1111"/>
+            <ac:graphicFrameMk id="5" creationId="{98A8B68E-10FD-B2B3-DFAD-69EA654F2DB8}"/>
+          </ac:graphicFrameMkLst>
+        </pc:graphicFrameChg>
+        <pc:graphicFrameChg chg="mod modGraphic">
+          <ac:chgData name="Baráth, Július" userId="aebde9b9-dccc-4475-a9ac-c05e78323d7a" providerId="ADAL" clId="{4A0811C8-ED2F-505E-B787-C8270CED5046}" dt="2026-05-11T05:08:22.801" v="12" actId="14100"/>
+          <ac:graphicFrameMkLst>
+            <pc:docMk/>
+            <pc:sldMk cId="3700394357" sldId="1111"/>
+            <ac:graphicFrameMk id="7" creationId="{943EF9E4-E8EF-49D5-BCA2-E3BCF72CD015}"/>
+          </ac:graphicFrameMkLst>
+        </pc:graphicFrameChg>
+      </pc:sldChg>
       <pc:sldChg chg="modSp mod">
         <pc:chgData name="Baráth, Július" userId="aebde9b9-dccc-4475-a9ac-c05e78323d7a" providerId="ADAL" clId="{4A0811C8-ED2F-505E-B787-C8270CED5046}" dt="2026-05-07T09:24:22.626" v="0" actId="115"/>
         <pc:sldMkLst>
@@ -488,7 +519,7 @@
           <a:p>
             <a:fld id="{136337D9-3022-3D41-8D8A-BDF2F3B0DD8E}" type="datetimeFigureOut">
               <a:rPr lang="en-US" smtClean="0"/>
-              <a:t>5/7/26</a:t>
+              <a:t>5/11/26</a:t>
             </a:fld>
             <a:endParaRPr lang="en-US" dirty="0"/>
           </a:p>
@@ -34170,14 +34201,14 @@
           <p:nvPr>
             <p:extLst>
               <p:ext uri="{D42A27DB-BD31-4B8C-83A1-F6EECF244321}">
-                <p14:modId xmlns:p14="http://schemas.microsoft.com/office/powerpoint/2010/main" val="1249493078"/>
+                <p14:modId xmlns:p14="http://schemas.microsoft.com/office/powerpoint/2010/main" val="3036768238"/>
               </p:ext>
             </p:extLst>
           </p:nvPr>
         </p:nvGraphicFramePr>
         <p:xfrm>
-          <a:off x="440064" y="1097756"/>
-          <a:ext cx="8237365" cy="3558545"/>
+          <a:off x="440064" y="1097757"/>
+          <a:ext cx="5909581" cy="3840480"/>
         </p:xfrm>
         <a:graphic>
           <a:graphicData uri="http://schemas.openxmlformats.org/drawingml/2006/table">
@@ -34186,21 +34217,21 @@
                 <a:tableStyleId>{5C22544A-7EE6-4342-B048-85BDC9FD1C3A}</a:tableStyleId>
               </a:tblPr>
               <a:tblGrid>
-                <a:gridCol w="1582945">
+                <a:gridCol w="1135623">
                   <a:extLst>
                     <a:ext uri="{9D8B030D-6E8A-4147-A177-3AD203B41FA5}">
                       <a16:colId xmlns:a16="http://schemas.microsoft.com/office/drawing/2014/main" val="3729139006"/>
                     </a:ext>
                   </a:extLst>
                 </a:gridCol>
-                <a:gridCol w="1901628">
+                <a:gridCol w="1364250">
                   <a:extLst>
                     <a:ext uri="{9D8B030D-6E8A-4147-A177-3AD203B41FA5}">
                       <a16:colId xmlns:a16="http://schemas.microsoft.com/office/drawing/2014/main" val="817269429"/>
                     </a:ext>
                   </a:extLst>
                 </a:gridCol>
-                <a:gridCol w="4752792">
+                <a:gridCol w="3409708">
                   <a:extLst>
                     <a:ext uri="{9D8B030D-6E8A-4147-A177-3AD203B41FA5}">
                       <a16:colId xmlns:a16="http://schemas.microsoft.com/office/drawing/2014/main" val="1988913492"/>
@@ -34208,7 +34239,7 @@
                   </a:extLst>
                 </a:gridCol>
               </a:tblGrid>
-              <a:tr h="358145">
+              <a:tr h="353522">
                 <a:tc>
                   <a:txBody>
                     <a:bodyPr/>
@@ -34254,7 +34285,7 @@
                   </a:ext>
                 </a:extLst>
               </a:tr>
-              <a:tr h="238057">
+              <a:tr h="270779">
                 <a:tc>
                   <a:txBody>
                     <a:bodyPr/>
@@ -34312,7 +34343,7 @@
                   </a:ext>
                 </a:extLst>
               </a:tr>
-              <a:tr h="404697">
+              <a:tr h="451298">
                 <a:tc>
                   <a:txBody>
                     <a:bodyPr/>
@@ -34414,7 +34445,7 @@
                   </a:ext>
                 </a:extLst>
               </a:tr>
-              <a:tr h="571337">
+              <a:tr h="631818">
                 <a:tc>
                   <a:txBody>
                     <a:bodyPr/>
@@ -34516,7 +34547,7 @@
                   </a:ext>
                 </a:extLst>
               </a:tr>
-              <a:tr h="404697">
+              <a:tr h="451298">
                 <a:tc>
                   <a:txBody>
                     <a:bodyPr/>
@@ -34618,7 +34649,7 @@
                   </a:ext>
                 </a:extLst>
               </a:tr>
-              <a:tr h="404697">
+              <a:tr h="451298">
                 <a:tc>
                   <a:txBody>
                     <a:bodyPr/>
@@ -34720,7 +34751,7 @@
                   </a:ext>
                 </a:extLst>
               </a:tr>
-              <a:tr h="404697">
+              <a:tr h="451298">
                 <a:tc>
                   <a:txBody>
                     <a:bodyPr/>
@@ -34856,7 +34887,7 @@
                   </a:ext>
                 </a:extLst>
               </a:tr>
-              <a:tr h="404697">
+              <a:tr h="451298">
                 <a:tc>
                   <a:txBody>
                     <a:bodyPr/>
@@ -34955,6 +34986,418 @@
                 <a:extLst>
                   <a:ext uri="{0D108BD9-81ED-4DB2-BD59-A6C34878D82A}">
                     <a16:rowId xmlns:a16="http://schemas.microsoft.com/office/drawing/2014/main" val="798378294"/>
+                  </a:ext>
+                </a:extLst>
+              </a:tr>
+            </a:tbl>
+          </a:graphicData>
+        </a:graphic>
+      </p:graphicFrame>
+      <p:sp>
+        <p:nvSpPr>
+          <p:cNvPr id="2" name="BlokTextu 1">
+            <a:extLst>
+              <a:ext uri="{FF2B5EF4-FFF2-40B4-BE49-F238E27FC236}">
+                <a16:creationId xmlns:a16="http://schemas.microsoft.com/office/drawing/2014/main" id="{7C9A1B41-F74A-6087-E7C8-9B47B6B1408A}"/>
+              </a:ext>
+            </a:extLst>
+          </p:cNvPr>
+          <p:cNvSpPr txBox="1"/>
+          <p:nvPr/>
+        </p:nvSpPr>
+        <p:spPr>
+          <a:xfrm>
+            <a:off x="6816436" y="1515474"/>
+            <a:ext cx="184731" cy="369332"/>
+          </a:xfrm>
+          <a:prstGeom prst="rect">
+            <a:avLst/>
+          </a:prstGeom>
+          <a:noFill/>
+        </p:spPr>
+        <p:txBody>
+          <a:bodyPr wrap="none" rtlCol="0">
+            <a:spAutoFit/>
+          </a:bodyPr>
+          <a:lstStyle/>
+          <a:p>
+            <a:endParaRPr lang="sk-SK" dirty="0"/>
+          </a:p>
+        </p:txBody>
+      </p:sp>
+      <p:graphicFrame>
+        <p:nvGraphicFramePr>
+          <p:cNvPr id="5" name="Tabuľka 4">
+            <a:extLst>
+              <a:ext uri="{FF2B5EF4-FFF2-40B4-BE49-F238E27FC236}">
+                <a16:creationId xmlns:a16="http://schemas.microsoft.com/office/drawing/2014/main" id="{98A8B68E-10FD-B2B3-DFAD-69EA654F2DB8}"/>
+              </a:ext>
+            </a:extLst>
+          </p:cNvPr>
+          <p:cNvGraphicFramePr>
+            <a:graphicFrameLocks noGrp="1"/>
+          </p:cNvGraphicFramePr>
+          <p:nvPr>
+            <p:extLst>
+              <p:ext uri="{D42A27DB-BD31-4B8C-83A1-F6EECF244321}">
+                <p14:modId xmlns:p14="http://schemas.microsoft.com/office/powerpoint/2010/main" val="1728951920"/>
+              </p:ext>
+            </p:extLst>
+          </p:nvPr>
+        </p:nvGraphicFramePr>
+        <p:xfrm>
+          <a:off x="6502403" y="1225645"/>
+          <a:ext cx="2507848" cy="1012395"/>
+        </p:xfrm>
+        <a:graphic>
+          <a:graphicData uri="http://schemas.openxmlformats.org/drawingml/2006/table">
+            <a:tbl>
+              <a:tblPr/>
+              <a:tblGrid>
+                <a:gridCol w="2507848">
+                  <a:extLst>
+                    <a:ext uri="{9D8B030D-6E8A-4147-A177-3AD203B41FA5}">
+                      <a16:colId xmlns:a16="http://schemas.microsoft.com/office/drawing/2014/main" val="1785286259"/>
+                    </a:ext>
+                  </a:extLst>
+                </a:gridCol>
+              </a:tblGrid>
+              <a:tr h="202479">
+                <a:tc>
+                  <a:txBody>
+                    <a:bodyPr/>
+                    <a:lstStyle/>
+                    <a:p>
+                      <a:pPr algn="l" fontAlgn="b">
+                        <a:buNone/>
+                      </a:pPr>
+                      <a:r>
+                        <a:rPr lang="sk-SK" sz="1000" b="1" i="0" u="none" strike="noStrike" dirty="0">
+                          <a:solidFill>
+                            <a:srgbClr val="000000"/>
+                          </a:solidFill>
+                          <a:effectLst/>
+                          <a:latin typeface="Aptos Narrow" panose="020B0004020202020204" pitchFamily="34" charset="0"/>
+                        </a:rPr>
+                        <a:t>802.11be </a:t>
+                      </a:r>
+                      <a:r>
+                        <a:rPr lang="sk-SK" sz="1000" b="0" i="0" u="none" strike="noStrike" dirty="0">
+                          <a:solidFill>
+                            <a:srgbClr val="000000"/>
+                          </a:solidFill>
+                          <a:effectLst/>
+                          <a:latin typeface="Aptos Narrow" panose="020B0004020202020204" pitchFamily="34" charset="0"/>
+                        </a:rPr>
+                        <a:t>"Wi‑Fi 7, extrémna priepustnosť"</a:t>
+                      </a:r>
+                    </a:p>
+                  </a:txBody>
+                  <a:tcPr marL="9525" marR="9525" marT="9525" marB="0" anchor="b">
+                    <a:lnL>
+                      <a:noFill/>
+                    </a:lnL>
+                    <a:lnR>
+                      <a:noFill/>
+                    </a:lnR>
+                    <a:lnT>
+                      <a:noFill/>
+                    </a:lnT>
+                    <a:lnB>
+                      <a:noFill/>
+                    </a:lnB>
+                    <a:noFill/>
+                  </a:tcPr>
+                </a:tc>
+                <a:extLst>
+                  <a:ext uri="{0D108BD9-81ED-4DB2-BD59-A6C34878D82A}">
+                    <a16:rowId xmlns:a16="http://schemas.microsoft.com/office/drawing/2014/main" val="3863626210"/>
+                  </a:ext>
+                </a:extLst>
+              </a:tr>
+              <a:tr h="202479">
+                <a:tc>
+                  <a:txBody>
+                    <a:bodyPr/>
+                    <a:lstStyle/>
+                    <a:p>
+                      <a:pPr algn="l" fontAlgn="b">
+                        <a:buNone/>
+                      </a:pPr>
+                      <a:r>
+                        <a:rPr lang="sk-SK" sz="1000" b="1" i="0" u="none" strike="noStrike" dirty="0">
+                          <a:solidFill>
+                            <a:srgbClr val="000000"/>
+                          </a:solidFill>
+                          <a:effectLst/>
+                          <a:latin typeface="Aptos Narrow" panose="020B0004020202020204" pitchFamily="34" charset="0"/>
+                        </a:rPr>
+                        <a:t>802.11bh</a:t>
+                      </a:r>
+                      <a:r>
+                        <a:rPr lang="sk-SK" sz="1000" b="0" i="0" u="none" strike="noStrike" dirty="0">
+                          <a:solidFill>
+                            <a:srgbClr val="000000"/>
+                          </a:solidFill>
+                          <a:effectLst/>
+                          <a:latin typeface="Aptos Narrow" panose="020B0004020202020204" pitchFamily="34" charset="0"/>
+                        </a:rPr>
+                        <a:t> spoľahlivý </a:t>
+                      </a:r>
+                      <a:r>
+                        <a:rPr lang="sk-SK" sz="1000" b="0" i="0" u="none" strike="noStrike" dirty="0" err="1">
+                          <a:solidFill>
+                            <a:srgbClr val="000000"/>
+                          </a:solidFill>
+                          <a:effectLst/>
+                          <a:latin typeface="Aptos Narrow" panose="020B0004020202020204" pitchFamily="34" charset="0"/>
+                        </a:rPr>
+                        <a:t>broadcast</a:t>
+                      </a:r>
+                      <a:r>
+                        <a:rPr lang="sk-SK" sz="1000" b="0" i="0" u="none" strike="noStrike" dirty="0">
+                          <a:solidFill>
+                            <a:srgbClr val="000000"/>
+                          </a:solidFill>
+                          <a:effectLst/>
+                          <a:latin typeface="Aptos Narrow" panose="020B0004020202020204" pitchFamily="34" charset="0"/>
+                        </a:rPr>
+                        <a:t>/</a:t>
+                      </a:r>
+                      <a:r>
+                        <a:rPr lang="sk-SK" sz="1000" b="0" i="0" u="none" strike="noStrike" dirty="0" err="1">
+                          <a:solidFill>
+                            <a:srgbClr val="000000"/>
+                          </a:solidFill>
+                          <a:effectLst/>
+                          <a:latin typeface="Aptos Narrow" panose="020B0004020202020204" pitchFamily="34" charset="0"/>
+                        </a:rPr>
+                        <a:t>multicast</a:t>
+                      </a:r>
+                      <a:endParaRPr lang="sk-SK" sz="1000" b="0" i="0" u="none" strike="noStrike" dirty="0">
+                        <a:solidFill>
+                          <a:srgbClr val="000000"/>
+                        </a:solidFill>
+                        <a:effectLst/>
+                        <a:latin typeface="Aptos Narrow" panose="020B0004020202020204" pitchFamily="34" charset="0"/>
+                      </a:endParaRPr>
+                    </a:p>
+                  </a:txBody>
+                  <a:tcPr marL="9525" marR="9525" marT="9525" marB="0" anchor="b">
+                    <a:lnL>
+                      <a:noFill/>
+                    </a:lnL>
+                    <a:lnR>
+                      <a:noFill/>
+                    </a:lnR>
+                    <a:lnT>
+                      <a:noFill/>
+                    </a:lnT>
+                    <a:lnB>
+                      <a:noFill/>
+                    </a:lnB>
+                    <a:noFill/>
+                  </a:tcPr>
+                </a:tc>
+                <a:extLst>
+                  <a:ext uri="{0D108BD9-81ED-4DB2-BD59-A6C34878D82A}">
+                    <a16:rowId xmlns:a16="http://schemas.microsoft.com/office/drawing/2014/main" val="1391575586"/>
+                  </a:ext>
+                </a:extLst>
+              </a:tr>
+              <a:tr h="202479">
+                <a:tc>
+                  <a:txBody>
+                    <a:bodyPr/>
+                    <a:lstStyle/>
+                    <a:p>
+                      <a:pPr algn="l" fontAlgn="b">
+                        <a:buNone/>
+                      </a:pPr>
+                      <a:r>
+                        <a:rPr lang="sk-SK" sz="1000" b="1" i="0" u="none" strike="noStrike" dirty="0">
+                          <a:solidFill>
+                            <a:srgbClr val="000000"/>
+                          </a:solidFill>
+                          <a:effectLst/>
+                          <a:latin typeface="Aptos Narrow" panose="020B0004020202020204" pitchFamily="34" charset="0"/>
+                        </a:rPr>
+                        <a:t>802.11bk</a:t>
+                      </a:r>
+                      <a:r>
+                        <a:rPr lang="sk-SK" sz="1000" b="0" i="0" u="none" strike="noStrike" dirty="0">
+                          <a:solidFill>
+                            <a:srgbClr val="000000"/>
+                          </a:solidFill>
+                          <a:effectLst/>
+                          <a:latin typeface="Aptos Narrow" panose="020B0004020202020204" pitchFamily="34" charset="0"/>
+                        </a:rPr>
+                        <a:t>,doplnkové rozšírenia</a:t>
+                      </a:r>
+                    </a:p>
+                  </a:txBody>
+                  <a:tcPr marL="9525" marR="9525" marT="9525" marB="0" anchor="b">
+                    <a:lnL>
+                      <a:noFill/>
+                    </a:lnL>
+                    <a:lnR>
+                      <a:noFill/>
+                    </a:lnR>
+                    <a:lnT>
+                      <a:noFill/>
+                    </a:lnT>
+                    <a:lnB>
+                      <a:noFill/>
+                    </a:lnB>
+                    <a:noFill/>
+                  </a:tcPr>
+                </a:tc>
+                <a:extLst>
+                  <a:ext uri="{0D108BD9-81ED-4DB2-BD59-A6C34878D82A}">
+                    <a16:rowId xmlns:a16="http://schemas.microsoft.com/office/drawing/2014/main" val="1726329975"/>
+                  </a:ext>
+                </a:extLst>
+              </a:tr>
+              <a:tr h="202479">
+                <a:tc>
+                  <a:txBody>
+                    <a:bodyPr/>
+                    <a:lstStyle/>
+                    <a:p>
+                      <a:pPr algn="l" fontAlgn="b">
+                        <a:buNone/>
+                      </a:pPr>
+                      <a:r>
+                        <a:rPr lang="sk-SK" sz="1000" b="1" i="0" u="none" strike="noStrike" dirty="0">
+                          <a:solidFill>
+                            <a:srgbClr val="000000"/>
+                          </a:solidFill>
+                          <a:effectLst/>
+                          <a:latin typeface="Aptos Narrow" panose="020B0004020202020204" pitchFamily="34" charset="0"/>
+                        </a:rPr>
+                        <a:t>802.11bf</a:t>
+                      </a:r>
+                      <a:r>
+                        <a:rPr lang="sk-SK" sz="1000" b="0" i="0" u="none" strike="noStrike" dirty="0">
+                          <a:solidFill>
+                            <a:srgbClr val="000000"/>
+                          </a:solidFill>
+                          <a:effectLst/>
+                          <a:latin typeface="Aptos Narrow" panose="020B0004020202020204" pitchFamily="34" charset="0"/>
+                        </a:rPr>
+                        <a:t>,Wi‑Fi </a:t>
+                      </a:r>
+                      <a:r>
+                        <a:rPr lang="sk-SK" sz="1000" b="0" i="0" u="none" strike="noStrike" dirty="0" err="1">
+                          <a:solidFill>
+                            <a:srgbClr val="000000"/>
+                          </a:solidFill>
+                          <a:effectLst/>
+                          <a:latin typeface="Aptos Narrow" panose="020B0004020202020204" pitchFamily="34" charset="0"/>
+                        </a:rPr>
+                        <a:t>sensing</a:t>
+                      </a:r>
+                      <a:endParaRPr lang="sk-SK" sz="1000" b="0" i="0" u="none" strike="noStrike" dirty="0">
+                        <a:solidFill>
+                          <a:srgbClr val="000000"/>
+                        </a:solidFill>
+                        <a:effectLst/>
+                        <a:latin typeface="Aptos Narrow" panose="020B0004020202020204" pitchFamily="34" charset="0"/>
+                      </a:endParaRPr>
+                    </a:p>
+                  </a:txBody>
+                  <a:tcPr marL="9525" marR="9525" marT="9525" marB="0" anchor="b">
+                    <a:lnL>
+                      <a:noFill/>
+                    </a:lnL>
+                    <a:lnR>
+                      <a:noFill/>
+                    </a:lnR>
+                    <a:lnT>
+                      <a:noFill/>
+                    </a:lnT>
+                    <a:lnB>
+                      <a:noFill/>
+                    </a:lnB>
+                    <a:noFill/>
+                  </a:tcPr>
+                </a:tc>
+                <a:extLst>
+                  <a:ext uri="{0D108BD9-81ED-4DB2-BD59-A6C34878D82A}">
+                    <a16:rowId xmlns:a16="http://schemas.microsoft.com/office/drawing/2014/main" val="3267025499"/>
+                  </a:ext>
+                </a:extLst>
+              </a:tr>
+              <a:tr h="202479">
+                <a:tc>
+                  <a:txBody>
+                    <a:bodyPr/>
+                    <a:lstStyle/>
+                    <a:p>
+                      <a:pPr algn="l" fontAlgn="b">
+                        <a:buNone/>
+                      </a:pPr>
+                      <a:r>
+                        <a:rPr lang="sk-SK" sz="1000" b="1" i="0" u="none" strike="noStrike" dirty="0">
+                          <a:solidFill>
+                            <a:srgbClr val="000000"/>
+                          </a:solidFill>
+                          <a:effectLst/>
+                          <a:latin typeface="Aptos Narrow" panose="020B0004020202020204" pitchFamily="34" charset="0"/>
+                        </a:rPr>
+                        <a:t>802.11bn</a:t>
+                      </a:r>
+                      <a:r>
+                        <a:rPr lang="sk-SK" sz="1000" b="0" i="0" u="none" strike="noStrike" dirty="0">
+                          <a:solidFill>
+                            <a:srgbClr val="000000"/>
+                          </a:solidFill>
+                          <a:effectLst/>
+                          <a:latin typeface="Aptos Narrow" panose="020B0004020202020204" pitchFamily="34" charset="0"/>
+                        </a:rPr>
+                        <a:t>,vo </a:t>
+                      </a:r>
+                      <a:r>
+                        <a:rPr lang="sk-SK" sz="1000" b="0" i="0" u="none" strike="noStrike" dirty="0" err="1">
+                          <a:solidFill>
+                            <a:srgbClr val="000000"/>
+                          </a:solidFill>
+                          <a:effectLst/>
+                          <a:latin typeface="Aptos Narrow" panose="020B0004020202020204" pitchFamily="34" charset="0"/>
+                        </a:rPr>
+                        <a:t>vývoji,"Wi‑Fi</a:t>
+                      </a:r>
+                      <a:r>
+                        <a:rPr lang="sk-SK" sz="1000" b="0" i="0" u="none" strike="noStrike" dirty="0">
+                          <a:solidFill>
+                            <a:srgbClr val="000000"/>
+                          </a:solidFill>
+                          <a:effectLst/>
+                          <a:latin typeface="Aptos Narrow" panose="020B0004020202020204" pitchFamily="34" charset="0"/>
+                        </a:rPr>
+                        <a:t> 8, ďalšia generácia"</a:t>
+                      </a:r>
+                    </a:p>
+                  </a:txBody>
+                  <a:tcPr marL="9525" marR="9525" marT="9525" marB="0" anchor="b">
+                    <a:lnL>
+                      <a:noFill/>
+                    </a:lnL>
+                    <a:lnR>
+                      <a:noFill/>
+                    </a:lnR>
+                    <a:lnT>
+                      <a:noFill/>
+                    </a:lnT>
+                    <a:lnB>
+                      <a:noFill/>
+                    </a:lnB>
+                    <a:noFill/>
+                  </a:tcPr>
+                </a:tc>
+                <a:extLst>
+                  <a:ext uri="{0D108BD9-81ED-4DB2-BD59-A6C34878D82A}">
+                    <a16:rowId xmlns:a16="http://schemas.microsoft.com/office/drawing/2014/main" val="429826805"/>
                   </a:ext>
                 </a:extLst>
               </a:tr>
